--- a/curso/pptx/S68.pptx
+++ b/curso/pptx/S68.pptx
@@ -7165,7 +7165,7 @@
                 </a:solidFill>
                 <a:latin typeface="Nunito Sans"/>
               </a:rPr>
-              <a:t>Sale sobre todo de la </a:t>
+              <a:t>主要来自</a:t>
             </a:r>
             <a:r>
               <a:rPr sz="2800" b="1">
@@ -7174,7 +7174,7 @@
                 </a:solidFill>
                 <a:latin typeface="Nunito Sans"/>
               </a:rPr>
-              <a:t>energía</a:t>
+              <a:t>能源</a:t>
             </a:r>
             <a:r>
               <a:rPr sz="2800" b="0">
@@ -7183,7 +7183,7 @@
                 </a:solidFill>
                 <a:latin typeface="Nunito Sans"/>
               </a:rPr>
-              <a:t>: luz, calefacción, transporte, fábricas</a:t>
+              <a:t>：电、取暖、交通、工厂</a:t>
             </a:r>
           </a:p>
           <a:p>
@@ -7208,7 +7208,7 @@
                 </a:solidFill>
                 <a:latin typeface="Nunito Sans"/>
               </a:rPr>
-              <a:t>Es la parte </a:t>
+              <a:t>它是富裕国家足迹中</a:t>
             </a:r>
             <a:r>
               <a:rPr sz="2800" b="1">
@@ -7217,7 +7217,7 @@
                 </a:solidFill>
                 <a:latin typeface="Nunito Sans"/>
               </a:rPr>
-              <a:t>más grande</a:t>
+              <a:t>最大</a:t>
             </a:r>
             <a:r>
               <a:rPr sz="2800" b="0">
@@ -7226,7 +7226,7 @@
                 </a:solidFill>
                 <a:latin typeface="Nunito Sans"/>
               </a:rPr>
-              <a:t> de la huella de los países ricos</a:t>
+              <a:t>的一部分</a:t>
             </a:r>
           </a:p>
           <a:p>
@@ -7251,7 +7251,7 @@
                 </a:solidFill>
                 <a:latin typeface="Nunito Sans"/>
               </a:rPr>
-              <a:t>Se mide en </a:t>
+              <a:t>用CO₂的</a:t>
             </a:r>
             <a:r>
               <a:rPr sz="2800" b="1">
@@ -7260,7 +7260,7 @@
                 </a:solidFill>
                 <a:latin typeface="Nunito Sans"/>
               </a:rPr>
-              <a:t>toneladas</a:t>
+              <a:t>吨数</a:t>
             </a:r>
             <a:r>
               <a:rPr sz="2800" b="0">
@@ -7269,7 +7269,7 @@
                 </a:solidFill>
                 <a:latin typeface="Nunito Sans"/>
               </a:rPr>
-              <a:t> de CO₂</a:t>
+              <a:t>来衡量</a:t>
             </a:r>
           </a:p>
         </p:txBody>
@@ -7460,7 +7460,7 @@
                 </a:solidFill>
                 <a:latin typeface="Nunito Sans"/>
               </a:rPr>
-              <a:t>Energía y transporte:</a:t>
+              <a:t>能源和交通：</a:t>
             </a:r>
             <a:r>
               <a:rPr sz="2800" b="0">
@@ -7469,7 +7469,7 @@
                 </a:solidFill>
                 <a:latin typeface="Nunito Sans"/>
               </a:rPr>
-              <a:t> calefacción, luz, coche, avión</a:t>
+              <a:t>取暖、电、汽车、飞机</a:t>
             </a:r>
           </a:p>
           <a:p>
@@ -7494,7 +7494,7 @@
                 </a:solidFill>
                 <a:latin typeface="Nunito Sans"/>
               </a:rPr>
-              <a:t>Comida:</a:t>
+              <a:t>食物：</a:t>
             </a:r>
             <a:r>
               <a:rPr sz="2800" b="0">
@@ -7503,7 +7503,7 @@
                 </a:solidFill>
                 <a:latin typeface="Nunito Sans"/>
               </a:rPr>
-              <a:t> sobre todo la carne</a:t>
+              <a:t>主要是肉</a:t>
             </a:r>
           </a:p>
           <a:p>
@@ -7528,7 +7528,7 @@
                 </a:solidFill>
                 <a:latin typeface="Nunito Sans"/>
               </a:rPr>
-              <a:t>Ropa y compras:</a:t>
+              <a:t>衣服和购物：</a:t>
             </a:r>
             <a:r>
               <a:rPr sz="2800" b="0">
@@ -7537,7 +7537,7 @@
                 </a:solidFill>
                 <a:latin typeface="Nunito Sans"/>
               </a:rPr>
-              <a:t> la moda rápida tiene una huella enorme</a:t>
+              <a:t>快时尚的足迹非常大</a:t>
             </a:r>
           </a:p>
         </p:txBody>
@@ -8201,7 +8201,7 @@
                 </a:solidFill>
                 <a:latin typeface="Nunito Sans"/>
               </a:rPr>
-              <a:t>Sequías e inundaciones golpean más a quien tiene menos medios</a:t>
+              <a:t>干旱和洪水对手段最少的人打击最大</a:t>
             </a:r>
           </a:p>
           <a:p>
@@ -8226,7 +8226,7 @@
                 </a:solidFill>
                 <a:latin typeface="Nunito Sans"/>
               </a:rPr>
-              <a:t>Muchas de esas personas apenas han contaminado</a:t>
+              <a:t>这些人中的很多人几乎没有污染过</a:t>
             </a:r>
           </a:p>
           <a:p>
@@ -8251,7 +8251,7 @@
                 </a:solidFill>
                 <a:latin typeface="Nunito Sans"/>
               </a:rPr>
-              <a:t>Pregunta crítica: ¿quién </a:t>
+              <a:t>批判性问题：谁</a:t>
             </a:r>
             <a:r>
               <a:rPr sz="2800" b="1">
@@ -8260,7 +8260,7 @@
                 </a:solidFill>
                 <a:latin typeface="Nunito Sans"/>
               </a:rPr>
-              <a:t>gana</a:t>
+              <a:t>得益</a:t>
             </a:r>
             <a:r>
               <a:rPr sz="2800" b="0">
@@ -8269,7 +8269,7 @@
                 </a:solidFill>
                 <a:latin typeface="Nunito Sans"/>
               </a:rPr>
-              <a:t> y quién </a:t>
+              <a:t>，谁</a:t>
             </a:r>
             <a:r>
               <a:rPr sz="2800" b="1">
@@ -8278,7 +8278,7 @@
                 </a:solidFill>
                 <a:latin typeface="Nunito Sans"/>
               </a:rPr>
-              <a:t>paga</a:t>
+              <a:t>买单</a:t>
             </a:r>
             <a:r>
               <a:rPr sz="2800" b="0">
@@ -8287,7 +8287,7 @@
                 </a:solidFill>
                 <a:latin typeface="Nunito Sans"/>
               </a:rPr>
-              <a:t>?</a:t>
+              <a:t>？</a:t>
             </a:r>
           </a:p>
         </p:txBody>

--- a/curso/pptx/S68.pptx
+++ b/curso/pptx/S68.pptx
@@ -4542,7 +4542,7 @@
                 </a:solidFill>
                 <a:latin typeface="Nunito Sans"/>
               </a:rPr>
-              <a:t>凯文每周吃三个牛肉汉堡。蕾尔每周吃三盘扁豆。哪种饭的足迹更大？（编造的例子。）</a:t>
+              <a:t>一个男孩每周吃三个牛肉汉堡。一个女孩每周吃三盘扁豆。哪种饭的足迹更大？（编造的例子。）</a:t>
             </a:r>
           </a:p>
         </p:txBody>
@@ -4701,7 +4701,7 @@
                 </a:solidFill>
                 <a:latin typeface="Nunito Sans"/>
               </a:rPr>
-              <a:t>占很大比重。这是一个数据，不是对凯文的评判。</a:t>
+              <a:t>占很大比重。这是一个数据，不是对这个男孩的评判。</a:t>
             </a:r>
           </a:p>
         </p:txBody>
@@ -5214,7 +5214,7 @@
                 </a:solidFill>
                 <a:latin typeface="Nunito Sans"/>
               </a:rPr>
-              <a:t>冬天，伊克尔选了家附近一个有暖气的温室里的西红柿，而不是阿尔梅里亚的。“本地的总是污染更少，”他说。（编造的例子。）</a:t>
+              <a:t>冬天，一个男孩选了家附近一个有暖气的温室里的西红柿，而不是阿尔梅里亚的。“本地的总是污染更少，”他说。（编造的例子。）</a:t>
             </a:r>
           </a:p>
         </p:txBody>
